--- a/data/deep_dives/carteira_fidc_robbin_pagamentos_602eaabd/exports/documentary_comparison.pptx
+++ b/data/deep_dives/carteira_fidc_robbin_pagamentos_602eaabd/exports/documentary_comparison.pptx
@@ -4281,7 +4281,7 @@
                       <a:r>
                         <a:rPr sz="1300" b="1">
                           <a:solidFill>
-                            <a:srgbClr val="1F1F1F"/>
+                            <a:srgbClr val="FFFFFF"/>
                           </a:solidFill>
                           <a:latin typeface="Calibri"/>
                         </a:rPr>
@@ -4291,7 +4291,7 @@
                   </a:txBody>
                   <a:tcPr marL="91440" marR="91440" marT="41148" marB="41148" anchor="ctr">
                     <a:solidFill>
-                      <a:srgbClr val="EC7000"/>
+                      <a:srgbClr val="FF6200"/>
                     </a:solidFill>
                     <a:lnL>
                       <a:noFill/>
@@ -4330,7 +4330,7 @@
                       <a:r>
                         <a:rPr sz="1300" b="1">
                           <a:solidFill>
-                            <a:srgbClr val="1F1F1F"/>
+                            <a:srgbClr val="FFFFFF"/>
                           </a:solidFill>
                           <a:latin typeface="Calibri"/>
                         </a:rPr>
@@ -4340,7 +4340,7 @@
                   </a:txBody>
                   <a:tcPr marL="91440" marR="91440" marT="41148" marB="41148" anchor="ctr">
                     <a:solidFill>
-                      <a:srgbClr val="EC7000"/>
+                      <a:srgbClr val="FF6200"/>
                     </a:solidFill>
                     <a:lnL>
                       <a:noFill/>
@@ -4528,7 +4528,7 @@
                           </a:solidFill>
                           <a:latin typeface="Calibri"/>
                         </a:rPr>
-                        <a:t>Não localizado nas fontes acessíveis desta leitura</a:t>
+                        <a:t>-</a:t>
                       </a:r>
                     </a:p>
                   </a:txBody>
@@ -4624,7 +4624,7 @@
                           </a:solidFill>
                           <a:latin typeface="Calibri"/>
                         </a:rPr>
-                        <a:t>Não localizado nas fontes acessíveis desta leitura</a:t>
+                        <a:t>-</a:t>
                       </a:r>
                     </a:p>
                   </a:txBody>
@@ -4720,7 +4720,7 @@
                           </a:solidFill>
                           <a:latin typeface="Calibri"/>
                         </a:rPr>
-                        <a:t>Não localizado nas fontes acessíveis desta leitura</a:t>
+                        <a:t>-</a:t>
                       </a:r>
                     </a:p>
                   </a:txBody>
@@ -5162,7 +5162,7 @@
                       <a:r>
                         <a:rPr sz="1300" b="1">
                           <a:solidFill>
-                            <a:srgbClr val="1F1F1F"/>
+                            <a:srgbClr val="FFFFFF"/>
                           </a:solidFill>
                           <a:latin typeface="Calibri"/>
                         </a:rPr>
@@ -5172,7 +5172,7 @@
                   </a:txBody>
                   <a:tcPr marL="91440" marR="91440" marT="41148" marB="41148" anchor="ctr">
                     <a:solidFill>
-                      <a:srgbClr val="EC7000"/>
+                      <a:srgbClr val="FF6200"/>
                     </a:solidFill>
                     <a:lnL>
                       <a:noFill/>
@@ -5211,7 +5211,7 @@
                       <a:r>
                         <a:rPr sz="1300" b="1">
                           <a:solidFill>
-                            <a:srgbClr val="1F1F1F"/>
+                            <a:srgbClr val="FFFFFF"/>
                           </a:solidFill>
                           <a:latin typeface="Calibri"/>
                         </a:rPr>
@@ -5221,7 +5221,7 @@
                   </a:txBody>
                   <a:tcPr marL="91440" marR="91440" marT="41148" marB="41148" anchor="ctr">
                     <a:solidFill>
-                      <a:srgbClr val="EC7000"/>
+                      <a:srgbClr val="FF6200"/>
                     </a:solidFill>
                     <a:lnL>
                       <a:noFill/>
@@ -5743,7 +5743,7 @@
                           </a:solidFill>
                           <a:latin typeface="Calibri"/>
                         </a:rPr>
-                        <a:t>Não localizado nas fontes acessíveis desta leitura</a:t>
+                        <a:t>-</a:t>
                       </a:r>
                     </a:p>
                   </a:txBody>
@@ -5947,7 +5947,7 @@
                       <a:r>
                         <a:rPr sz="1300" b="1">
                           <a:solidFill>
-                            <a:srgbClr val="1F1F1F"/>
+                            <a:srgbClr val="FFFFFF"/>
                           </a:solidFill>
                           <a:latin typeface="Calibri"/>
                         </a:rPr>
@@ -5957,7 +5957,7 @@
                   </a:txBody>
                   <a:tcPr marL="91440" marR="91440" marT="41148" marB="41148" anchor="ctr">
                     <a:solidFill>
-                      <a:srgbClr val="EC7000"/>
+                      <a:srgbClr val="FF6200"/>
                     </a:solidFill>
                     <a:lnL>
                       <a:noFill/>
@@ -5996,7 +5996,7 @@
                       <a:r>
                         <a:rPr sz="1300" b="1">
                           <a:solidFill>
-                            <a:srgbClr val="1F1F1F"/>
+                            <a:srgbClr val="FFFFFF"/>
                           </a:solidFill>
                           <a:latin typeface="Calibri"/>
                         </a:rPr>
@@ -6006,7 +6006,7 @@
                   </a:txBody>
                   <a:tcPr marL="91440" marR="91440" marT="41148" marB="41148" anchor="ctr">
                     <a:solidFill>
-                      <a:srgbClr val="EC7000"/>
+                      <a:srgbClr val="FF6200"/>
                     </a:solidFill>
                     <a:lnL>
                       <a:noFill/>
@@ -6194,7 +6194,7 @@
                           </a:solidFill>
                           <a:latin typeface="Calibri"/>
                         </a:rPr>
-                        <a:t>Não localizado nas fontes acessíveis desta leitura</a:t>
+                        <a:t>-</a:t>
                       </a:r>
                     </a:p>
                   </a:txBody>
@@ -6290,7 +6290,7 @@
                           </a:solidFill>
                           <a:latin typeface="Calibri"/>
                         </a:rPr>
-                        <a:t>Não localizado nas fontes acessíveis desta leitura</a:t>
+                        <a:t>-</a:t>
                       </a:r>
                     </a:p>
                   </a:txBody>
@@ -6482,7 +6482,7 @@
                           </a:solidFill>
                           <a:latin typeface="Calibri"/>
                         </a:rPr>
-                        <a:t>Não localizado nas fontes acessíveis desta leitura</a:t>
+                        <a:t>-</a:t>
                       </a:r>
                     </a:p>
                   </a:txBody>
@@ -6784,7 +6784,7 @@
                       <a:r>
                         <a:rPr sz="1300" b="1">
                           <a:solidFill>
-                            <a:srgbClr val="1F1F1F"/>
+                            <a:srgbClr val="FFFFFF"/>
                           </a:solidFill>
                           <a:latin typeface="Calibri"/>
                         </a:rPr>
@@ -6794,7 +6794,7 @@
                   </a:txBody>
                   <a:tcPr marL="91440" marR="91440" marT="41148" marB="41148" anchor="ctr">
                     <a:solidFill>
-                      <a:srgbClr val="EC7000"/>
+                      <a:srgbClr val="FF6200"/>
                     </a:solidFill>
                     <a:lnL>
                       <a:noFill/>
@@ -6833,7 +6833,7 @@
                       <a:r>
                         <a:rPr sz="1300" b="1">
                           <a:solidFill>
-                            <a:srgbClr val="1F1F1F"/>
+                            <a:srgbClr val="FFFFFF"/>
                           </a:solidFill>
                           <a:latin typeface="Calibri"/>
                         </a:rPr>
@@ -6843,7 +6843,7 @@
                   </a:txBody>
                   <a:tcPr marL="91440" marR="91440" marT="41148" marB="41148" anchor="ctr">
                     <a:solidFill>
-                      <a:srgbClr val="EC7000"/>
+                      <a:srgbClr val="FF6200"/>
                     </a:solidFill>
                     <a:lnL>
                       <a:noFill/>
@@ -7031,7 +7031,7 @@
                           </a:solidFill>
                           <a:latin typeface="Calibri"/>
                         </a:rPr>
-                        <a:t>Spread final não localizado; modelos remetem à definição no apêndice/bookbuilding</a:t>
+                        <a:t>-</a:t>
                       </a:r>
                     </a:p>
                   </a:txBody>
@@ -7429,7 +7429,7 @@
                       <a:r>
                         <a:rPr sz="1300" b="1">
                           <a:solidFill>
-                            <a:srgbClr val="1F1F1F"/>
+                            <a:srgbClr val="FFFFFF"/>
                           </a:solidFill>
                           <a:latin typeface="Calibri"/>
                         </a:rPr>
@@ -7439,7 +7439,7 @@
                   </a:txBody>
                   <a:tcPr marL="91440" marR="91440" marT="41148" marB="41148" anchor="ctr">
                     <a:solidFill>
-                      <a:srgbClr val="EC7000"/>
+                      <a:srgbClr val="FF6200"/>
                     </a:solidFill>
                     <a:lnL>
                       <a:noFill/>
@@ -7478,7 +7478,7 @@
                       <a:r>
                         <a:rPr sz="1300" b="1">
                           <a:solidFill>
-                            <a:srgbClr val="1F1F1F"/>
+                            <a:srgbClr val="FFFFFF"/>
                           </a:solidFill>
                           <a:latin typeface="Calibri"/>
                         </a:rPr>
@@ -7488,7 +7488,7 @@
                   </a:txBody>
                   <a:tcPr marL="91440" marR="91440" marT="41148" marB="41148" anchor="ctr">
                     <a:solidFill>
-                      <a:srgbClr val="EC7000"/>
+                      <a:srgbClr val="FF6200"/>
                     </a:solidFill>
                     <a:lnL>
                       <a:noFill/>
@@ -7580,7 +7580,7 @@
                           </a:solidFill>
                           <a:latin typeface="Calibri"/>
                         </a:rPr>
-                        <a:t>Não localizado nas fontes acessíveis desta leitura</a:t>
+                        <a:t>-</a:t>
                       </a:r>
                     </a:p>
                   </a:txBody>
@@ -7676,7 +7676,7 @@
                           </a:solidFill>
                           <a:latin typeface="Calibri"/>
                         </a:rPr>
-                        <a:t>Cronograma fechado não identificado nos modelos; confirmar ato específico da 2ª série</a:t>
+                        <a:t>-</a:t>
                       </a:r>
                     </a:p>
                   </a:txBody>
@@ -7774,7 +7774,7 @@
                           </a:solidFill>
                           <a:latin typeface="Calibri"/>
                         </a:rPr>
-                        <a:t>Não localizado nas fontes acessíveis desta leitura</a:t>
+                        <a:t>-</a:t>
                       </a:r>
                     </a:p>
                   </a:txBody>
@@ -7978,7 +7978,7 @@
                       <a:r>
                         <a:rPr sz="1300" b="1">
                           <a:solidFill>
-                            <a:srgbClr val="1F1F1F"/>
+                            <a:srgbClr val="FFFFFF"/>
                           </a:solidFill>
                           <a:latin typeface="Calibri"/>
                         </a:rPr>
@@ -7988,7 +7988,7 @@
                   </a:txBody>
                   <a:tcPr marL="91440" marR="91440" marT="41148" marB="41148" anchor="ctr">
                     <a:solidFill>
-                      <a:srgbClr val="EC7000"/>
+                      <a:srgbClr val="FF6200"/>
                     </a:solidFill>
                     <a:lnL>
                       <a:noFill/>
@@ -8027,7 +8027,7 @@
                       <a:r>
                         <a:rPr sz="1300" b="1">
                           <a:solidFill>
-                            <a:srgbClr val="1F1F1F"/>
+                            <a:srgbClr val="FFFFFF"/>
                           </a:solidFill>
                           <a:latin typeface="Calibri"/>
                         </a:rPr>
@@ -8037,7 +8037,7 @@
                   </a:txBody>
                   <a:tcPr marL="91440" marR="91440" marT="41148" marB="41148" anchor="ctr">
                     <a:solidFill>
-                      <a:srgbClr val="EC7000"/>
+                      <a:srgbClr val="FF6200"/>
                     </a:solidFill>
                     <a:lnL>
                       <a:noFill/>
@@ -8527,7 +8527,7 @@
                       <a:r>
                         <a:rPr sz="1300" b="1">
                           <a:solidFill>
-                            <a:srgbClr val="1F1F1F"/>
+                            <a:srgbClr val="FFFFFF"/>
                           </a:solidFill>
                           <a:latin typeface="Calibri"/>
                         </a:rPr>
@@ -8537,7 +8537,7 @@
                   </a:txBody>
                   <a:tcPr marL="91440" marR="91440" marT="41148" marB="41148" anchor="ctr">
                     <a:solidFill>
-                      <a:srgbClr val="EC7000"/>
+                      <a:srgbClr val="FF6200"/>
                     </a:solidFill>
                     <a:lnL>
                       <a:noFill/>
@@ -8576,7 +8576,7 @@
                       <a:r>
                         <a:rPr sz="1300" b="1">
                           <a:solidFill>
-                            <a:srgbClr val="1F1F1F"/>
+                            <a:srgbClr val="FFFFFF"/>
                           </a:solidFill>
                           <a:latin typeface="Calibri"/>
                         </a:rPr>
@@ -8586,7 +8586,7 @@
                   </a:txBody>
                   <a:tcPr marL="91440" marR="91440" marT="41148" marB="41148" anchor="ctr">
                     <a:solidFill>
-                      <a:srgbClr val="EC7000"/>
+                      <a:srgbClr val="FF6200"/>
                     </a:solidFill>
                     <a:lnL>
                       <a:noFill/>
@@ -8700,29 +8700,7 @@
                           </a:solidFill>
                           <a:latin typeface="Calibri"/>
                         </a:rPr>
-                        <a:t>Direitos creditórios / PL e cotas subordinadas / PL; validar ativo elegível, subclasses e fórmula</a:t>
-                      </a:r>
-                    </a:p>
-                    <a:p>
-                      <a:pPr algn="ctr">
-                        <a:lnSpc>
-                          <a:spcPct val="100000"/>
-                        </a:lnSpc>
-                        <a:spcBef>
-                          <a:spcPts val="0"/>
-                        </a:spcBef>
-                        <a:spcAft>
-                          <a:spcPts val="0"/>
-                        </a:spcAft>
-                      </a:pPr>
-                      <a:r>
-                        <a:rPr sz="1300" b="0">
-                          <a:solidFill>
-                            <a:srgbClr val="1F1F1F"/>
-                          </a:solidFill>
-                          <a:latin typeface="Calibri"/>
-                        </a:rPr>
-                        <a:t>contratual</a:t>
+                        <a:t>Direitos creditórios / PL e cotas subordinadas / PL</a:t>
                       </a:r>
                     </a:p>
                   </a:txBody>
@@ -9056,7 +9034,7 @@
                           </a:solidFill>
                           <a:latin typeface="Calibri"/>
                         </a:rPr>
-                        <a:t>Sem competência IME carregada em cache local</a:t>
+                        <a:t>-</a:t>
                       </a:r>
                     </a:p>
                   </a:txBody>
